--- a/Hypothesis_Approach.pptx
+++ b/Hypothesis_Approach.pptx
@@ -244,7 +244,7 @@
           <a:p>
             <a:fld id="{F4E22AD8-1461-413E-88B7-0A4B8F23A229}" type="datetimeFigureOut">
               <a:rPr lang="en-US" smtClean="0"/>
-              <a:t>5/7/2024</a:t>
+              <a:t>5/15/2024</a:t>
             </a:fld>
             <a:endParaRPr lang="en-US"/>
           </a:p>
@@ -414,7 +414,7 @@
           <a:p>
             <a:fld id="{F4E22AD8-1461-413E-88B7-0A4B8F23A229}" type="datetimeFigureOut">
               <a:rPr lang="en-US" smtClean="0"/>
-              <a:t>5/7/2024</a:t>
+              <a:t>5/15/2024</a:t>
             </a:fld>
             <a:endParaRPr lang="en-US"/>
           </a:p>
@@ -594,7 +594,7 @@
           <a:p>
             <a:fld id="{F4E22AD8-1461-413E-88B7-0A4B8F23A229}" type="datetimeFigureOut">
               <a:rPr lang="en-US" smtClean="0"/>
-              <a:t>5/7/2024</a:t>
+              <a:t>5/15/2024</a:t>
             </a:fld>
             <a:endParaRPr lang="en-US"/>
           </a:p>
@@ -764,7 +764,7 @@
           <a:p>
             <a:fld id="{F4E22AD8-1461-413E-88B7-0A4B8F23A229}" type="datetimeFigureOut">
               <a:rPr lang="en-US" smtClean="0"/>
-              <a:t>5/7/2024</a:t>
+              <a:t>5/15/2024</a:t>
             </a:fld>
             <a:endParaRPr lang="en-US"/>
           </a:p>
@@ -1008,7 +1008,7 @@
           <a:p>
             <a:fld id="{F4E22AD8-1461-413E-88B7-0A4B8F23A229}" type="datetimeFigureOut">
               <a:rPr lang="en-US" smtClean="0"/>
-              <a:t>5/7/2024</a:t>
+              <a:t>5/15/2024</a:t>
             </a:fld>
             <a:endParaRPr lang="en-US"/>
           </a:p>
@@ -1240,7 +1240,7 @@
           <a:p>
             <a:fld id="{F4E22AD8-1461-413E-88B7-0A4B8F23A229}" type="datetimeFigureOut">
               <a:rPr lang="en-US" smtClean="0"/>
-              <a:t>5/7/2024</a:t>
+              <a:t>5/15/2024</a:t>
             </a:fld>
             <a:endParaRPr lang="en-US"/>
           </a:p>
@@ -1607,7 +1607,7 @@
           <a:p>
             <a:fld id="{F4E22AD8-1461-413E-88B7-0A4B8F23A229}" type="datetimeFigureOut">
               <a:rPr lang="en-US" smtClean="0"/>
-              <a:t>5/7/2024</a:t>
+              <a:t>5/15/2024</a:t>
             </a:fld>
             <a:endParaRPr lang="en-US"/>
           </a:p>
@@ -1725,7 +1725,7 @@
           <a:p>
             <a:fld id="{F4E22AD8-1461-413E-88B7-0A4B8F23A229}" type="datetimeFigureOut">
               <a:rPr lang="en-US" smtClean="0"/>
-              <a:t>5/7/2024</a:t>
+              <a:t>5/15/2024</a:t>
             </a:fld>
             <a:endParaRPr lang="en-US"/>
           </a:p>
@@ -1820,7 +1820,7 @@
           <a:p>
             <a:fld id="{F4E22AD8-1461-413E-88B7-0A4B8F23A229}" type="datetimeFigureOut">
               <a:rPr lang="en-US" smtClean="0"/>
-              <a:t>5/7/2024</a:t>
+              <a:t>5/15/2024</a:t>
             </a:fld>
             <a:endParaRPr lang="en-US"/>
           </a:p>
@@ -2097,7 +2097,7 @@
           <a:p>
             <a:fld id="{F4E22AD8-1461-413E-88B7-0A4B8F23A229}" type="datetimeFigureOut">
               <a:rPr lang="en-US" smtClean="0"/>
-              <a:t>5/7/2024</a:t>
+              <a:t>5/15/2024</a:t>
             </a:fld>
             <a:endParaRPr lang="en-US"/>
           </a:p>
@@ -2354,7 +2354,7 @@
           <a:p>
             <a:fld id="{F4E22AD8-1461-413E-88B7-0A4B8F23A229}" type="datetimeFigureOut">
               <a:rPr lang="en-US" smtClean="0"/>
-              <a:t>5/7/2024</a:t>
+              <a:t>5/15/2024</a:t>
             </a:fld>
             <a:endParaRPr lang="en-US"/>
           </a:p>
@@ -2567,7 +2567,7 @@
           <a:p>
             <a:fld id="{F4E22AD8-1461-413E-88B7-0A4B8F23A229}" type="datetimeFigureOut">
               <a:rPr lang="en-US" smtClean="0"/>
-              <a:t>5/7/2024</a:t>
+              <a:t>5/15/2024</a:t>
             </a:fld>
             <a:endParaRPr lang="en-US"/>
           </a:p>
@@ -2981,7 +2981,7 @@
         <p:spPr>
           <a:xfrm>
             <a:off x="2507083" y="1101416"/>
-            <a:ext cx="1079213" cy="246221"/>
+            <a:ext cx="1269580" cy="246221"/>
           </a:xfrm>
           <a:prstGeom prst="rect">
             <a:avLst/>
@@ -3000,7 +3000,15 @@
                 <a:ea typeface="CMU Serif" panose="02000603000000000000" pitchFamily="2" charset="0"/>
                 <a:cs typeface="CMU Serif" panose="02000603000000000000" pitchFamily="2" charset="0"/>
               </a:rPr>
-              <a:t>Entire dataset</a:t>
+              <a:t>Entire </a:t>
+            </a:r>
+            <a:r>
+              <a:rPr lang="en-US" sz="1000" dirty="0" smtClean="0">
+                <a:latin typeface="CMU Serif" panose="02000603000000000000" pitchFamily="2" charset="0"/>
+                <a:ea typeface="CMU Serif" panose="02000603000000000000" pitchFamily="2" charset="0"/>
+                <a:cs typeface="CMU Serif" panose="02000603000000000000" pitchFamily="2" charset="0"/>
+              </a:rPr>
+              <a:t>dataset (E)</a:t>
             </a:r>
             <a:endParaRPr lang="en-US" sz="1000" dirty="0">
               <a:latin typeface="CMU Serif" panose="02000603000000000000" pitchFamily="2" charset="0"/>
@@ -3045,11 +3053,6 @@
               </a:rPr>
               <a:t>D</a:t>
             </a:r>
-            <a:endParaRPr lang="en-US" sz="823" dirty="0">
-              <a:latin typeface="CMU Serif" panose="02000603000000000000" pitchFamily="2" charset="0"/>
-              <a:ea typeface="CMU Serif" panose="02000603000000000000" pitchFamily="2" charset="0"/>
-              <a:cs typeface="CMU Serif" panose="02000603000000000000" pitchFamily="2" charset="0"/>
-            </a:endParaRPr>
           </a:p>
         </p:txBody>
       </p:sp>
@@ -3127,11 +3130,6 @@
               </a:rPr>
               <a:t>NN</a:t>
             </a:r>
-            <a:endParaRPr lang="en-US" sz="823" dirty="0">
-              <a:latin typeface="CMU Serif" panose="02000603000000000000" pitchFamily="2" charset="0"/>
-              <a:ea typeface="CMU Serif" panose="02000603000000000000" pitchFamily="2" charset="0"/>
-              <a:cs typeface="CMU Serif" panose="02000603000000000000" pitchFamily="2" charset="0"/>
-            </a:endParaRPr>
           </a:p>
         </p:txBody>
       </p:sp>
@@ -3207,11 +3205,6 @@
               </a:rPr>
               <a:t>M</a:t>
             </a:r>
-            <a:endParaRPr lang="en-US" sz="823" dirty="0">
-              <a:latin typeface="CMU Serif" panose="02000603000000000000" pitchFamily="2" charset="0"/>
-              <a:ea typeface="CMU Serif" panose="02000603000000000000" pitchFamily="2" charset="0"/>
-              <a:cs typeface="CMU Serif" panose="02000603000000000000" pitchFamily="2" charset="0"/>
-            </a:endParaRPr>
           </a:p>
         </p:txBody>
       </p:sp>
@@ -3251,11 +3244,6 @@
               </a:rPr>
               <a:t>E</a:t>
             </a:r>
-            <a:endParaRPr lang="en-US" sz="823" dirty="0">
-              <a:latin typeface="CMU Serif" panose="02000603000000000000" pitchFamily="2" charset="0"/>
-              <a:ea typeface="CMU Serif" panose="02000603000000000000" pitchFamily="2" charset="0"/>
-              <a:cs typeface="CMU Serif" panose="02000603000000000000" pitchFamily="2" charset="0"/>
-            </a:endParaRPr>
           </a:p>
         </p:txBody>
       </p:sp>
@@ -3267,7 +3255,7 @@
         </p:nvSpPr>
         <p:spPr>
           <a:xfrm>
-            <a:off x="579961" y="1447944"/>
+            <a:off x="579961" y="1937961"/>
             <a:ext cx="422903" cy="218971"/>
           </a:xfrm>
           <a:prstGeom prst="rect">
@@ -3295,11 +3283,6 @@
               </a:rPr>
               <a:t>L</a:t>
             </a:r>
-            <a:endParaRPr lang="en-US" sz="823" dirty="0">
-              <a:latin typeface="CMU Serif" panose="02000603000000000000" pitchFamily="2" charset="0"/>
-              <a:ea typeface="CMU Serif" panose="02000603000000000000" pitchFamily="2" charset="0"/>
-              <a:cs typeface="CMU Serif" panose="02000603000000000000" pitchFamily="2" charset="0"/>
-            </a:endParaRPr>
           </a:p>
         </p:txBody>
       </p:sp>
@@ -3311,7 +3294,7 @@
         </p:nvSpPr>
         <p:spPr>
           <a:xfrm>
-            <a:off x="1001605" y="1447944"/>
+            <a:off x="1001605" y="1937961"/>
             <a:ext cx="1374099" cy="218971"/>
           </a:xfrm>
           <a:prstGeom prst="rect">
@@ -3339,11 +3322,6 @@
               </a:rPr>
               <a:t>U</a:t>
             </a:r>
-            <a:endParaRPr lang="en-US" sz="823" dirty="0">
-              <a:latin typeface="CMU Serif" panose="02000603000000000000" pitchFamily="2" charset="0"/>
-              <a:ea typeface="CMU Serif" panose="02000603000000000000" pitchFamily="2" charset="0"/>
-              <a:cs typeface="CMU Serif" panose="02000603000000000000" pitchFamily="2" charset="0"/>
-            </a:endParaRPr>
           </a:p>
         </p:txBody>
       </p:sp>
@@ -3355,8 +3333,8 @@
         </p:nvSpPr>
         <p:spPr>
           <a:xfrm>
-            <a:off x="2507082" y="1475952"/>
-            <a:ext cx="3844505" cy="400110"/>
+            <a:off x="2507083" y="1475952"/>
+            <a:ext cx="3565106" cy="400110"/>
           </a:xfrm>
           <a:prstGeom prst="rect">
             <a:avLst/>
@@ -3375,7 +3353,39 @@
                 <a:ea typeface="CMU Serif" panose="02000603000000000000" pitchFamily="2" charset="0"/>
                 <a:cs typeface="CMU Serif" panose="02000603000000000000" pitchFamily="2" charset="0"/>
               </a:rPr>
-              <a:t>Entire dataset split into a Labeled (L) and Unlabeled (U) datasets </a:t>
+              <a:t>Entire dataset (</a:t>
+            </a:r>
+            <a:r>
+              <a:rPr lang="en-US" sz="1000" dirty="0" smtClean="0">
+                <a:latin typeface="CMU Serif" panose="02000603000000000000" pitchFamily="2" charset="0"/>
+                <a:ea typeface="CMU Serif" panose="02000603000000000000" pitchFamily="2" charset="0"/>
+                <a:cs typeface="CMU Serif" panose="02000603000000000000" pitchFamily="2" charset="0"/>
+              </a:rPr>
+              <a:t>E) </a:t>
+            </a:r>
+            <a:r>
+              <a:rPr lang="en-US" sz="1000" dirty="0" smtClean="0">
+                <a:latin typeface="CMU Serif" panose="02000603000000000000" pitchFamily="2" charset="0"/>
+                <a:ea typeface="CMU Serif" panose="02000603000000000000" pitchFamily="2" charset="0"/>
+                <a:cs typeface="CMU Serif" panose="02000603000000000000" pitchFamily="2" charset="0"/>
+              </a:rPr>
+              <a:t>split </a:t>
+            </a:r>
+            <a:r>
+              <a:rPr lang="en-US" sz="1000" dirty="0">
+                <a:latin typeface="CMU Serif" panose="02000603000000000000" pitchFamily="2" charset="0"/>
+                <a:ea typeface="CMU Serif" panose="02000603000000000000" pitchFamily="2" charset="0"/>
+                <a:cs typeface="CMU Serif" panose="02000603000000000000" pitchFamily="2" charset="0"/>
+              </a:rPr>
+              <a:t>into Train (D), Validation (V) and Test (T) datasets</a:t>
+            </a:r>
+            <a:r>
+              <a:rPr lang="en-US" sz="1000" dirty="0" smtClean="0">
+                <a:latin typeface="CMU Serif" panose="02000603000000000000" pitchFamily="2" charset="0"/>
+                <a:ea typeface="CMU Serif" panose="02000603000000000000" pitchFamily="2" charset="0"/>
+                <a:cs typeface="CMU Serif" panose="02000603000000000000" pitchFamily="2" charset="0"/>
+              </a:rPr>
+              <a:t>.</a:t>
             </a:r>
             <a:endParaRPr lang="en-US" sz="1000" dirty="0">
               <a:latin typeface="CMU Serif" panose="02000603000000000000" pitchFamily="2" charset="0"/>
@@ -3393,7 +3403,7 @@
         </p:nvSpPr>
         <p:spPr>
           <a:xfrm>
-            <a:off x="579960" y="1822604"/>
+            <a:off x="579960" y="1503508"/>
             <a:ext cx="909547" cy="218971"/>
           </a:xfrm>
           <a:prstGeom prst="rect">
@@ -3421,11 +3431,6 @@
               </a:rPr>
               <a:t>D</a:t>
             </a:r>
-            <a:endParaRPr lang="en-US" sz="823" dirty="0">
-              <a:latin typeface="CMU Serif" panose="02000603000000000000" pitchFamily="2" charset="0"/>
-              <a:ea typeface="CMU Serif" panose="02000603000000000000" pitchFamily="2" charset="0"/>
-              <a:cs typeface="CMU Serif" panose="02000603000000000000" pitchFamily="2" charset="0"/>
-            </a:endParaRPr>
           </a:p>
         </p:txBody>
       </p:sp>
@@ -3437,7 +3442,7 @@
         </p:nvSpPr>
         <p:spPr>
           <a:xfrm>
-            <a:off x="1896192" y="1823043"/>
+            <a:off x="1896192" y="1503947"/>
             <a:ext cx="479512" cy="218971"/>
           </a:xfrm>
           <a:prstGeom prst="rect">
@@ -3465,11 +3470,6 @@
               </a:rPr>
               <a:t>T</a:t>
             </a:r>
-            <a:endParaRPr lang="en-US" sz="823" dirty="0">
-              <a:latin typeface="CMU Serif" panose="02000603000000000000" pitchFamily="2" charset="0"/>
-              <a:ea typeface="CMU Serif" panose="02000603000000000000" pitchFamily="2" charset="0"/>
-              <a:cs typeface="CMU Serif" panose="02000603000000000000" pitchFamily="2" charset="0"/>
-            </a:endParaRPr>
           </a:p>
         </p:txBody>
       </p:sp>
@@ -3501,7 +3501,71 @@
                 <a:ea typeface="CMU Serif" panose="02000603000000000000" pitchFamily="2" charset="0"/>
                 <a:cs typeface="CMU Serif" panose="02000603000000000000" pitchFamily="2" charset="0"/>
               </a:rPr>
-              <a:t>Labeled dataset L gets split into Train (D), Validation (V) and Test (T) datasets.</a:t>
+              <a:t>Train dataset </a:t>
+            </a:r>
+            <a:r>
+              <a:rPr lang="en-US" sz="1000" dirty="0" smtClean="0">
+                <a:latin typeface="CMU Serif" panose="02000603000000000000" pitchFamily="2" charset="0"/>
+                <a:ea typeface="CMU Serif" panose="02000603000000000000" pitchFamily="2" charset="0"/>
+                <a:cs typeface="CMU Serif" panose="02000603000000000000" pitchFamily="2" charset="0"/>
+              </a:rPr>
+              <a:t>(</a:t>
+            </a:r>
+            <a:r>
+              <a:rPr lang="en-US" sz="1000" dirty="0">
+                <a:latin typeface="CMU Serif" panose="02000603000000000000" pitchFamily="2" charset="0"/>
+                <a:ea typeface="CMU Serif" panose="02000603000000000000" pitchFamily="2" charset="0"/>
+                <a:cs typeface="CMU Serif" panose="02000603000000000000" pitchFamily="2" charset="0"/>
+              </a:rPr>
+              <a:t>D</a:t>
+            </a:r>
+            <a:r>
+              <a:rPr lang="en-US" sz="1000" dirty="0" smtClean="0">
+                <a:latin typeface="CMU Serif" panose="02000603000000000000" pitchFamily="2" charset="0"/>
+                <a:ea typeface="CMU Serif" panose="02000603000000000000" pitchFamily="2" charset="0"/>
+                <a:cs typeface="CMU Serif" panose="02000603000000000000" pitchFamily="2" charset="0"/>
+              </a:rPr>
+              <a:t>)</a:t>
+            </a:r>
+            <a:r>
+              <a:rPr lang="en-US" sz="1000" dirty="0" smtClean="0">
+                <a:latin typeface="CMU Serif" panose="02000603000000000000" pitchFamily="2" charset="0"/>
+                <a:ea typeface="CMU Serif" panose="02000603000000000000" pitchFamily="2" charset="0"/>
+                <a:cs typeface="CMU Serif" panose="02000603000000000000" pitchFamily="2" charset="0"/>
+              </a:rPr>
+              <a:t> gets </a:t>
+            </a:r>
+            <a:r>
+              <a:rPr lang="en-US" sz="1000" dirty="0">
+                <a:latin typeface="CMU Serif" panose="02000603000000000000" pitchFamily="2" charset="0"/>
+                <a:ea typeface="CMU Serif" panose="02000603000000000000" pitchFamily="2" charset="0"/>
+                <a:cs typeface="CMU Serif" panose="02000603000000000000" pitchFamily="2" charset="0"/>
+              </a:rPr>
+              <a:t>split </a:t>
+            </a:r>
+            <a:r>
+              <a:rPr lang="en-US" sz="1000" dirty="0" smtClean="0">
+                <a:latin typeface="CMU Serif" panose="02000603000000000000" pitchFamily="2" charset="0"/>
+                <a:ea typeface="CMU Serif" panose="02000603000000000000" pitchFamily="2" charset="0"/>
+                <a:cs typeface="CMU Serif" panose="02000603000000000000" pitchFamily="2" charset="0"/>
+              </a:rPr>
+              <a:t>into </a:t>
+            </a:r>
+            <a:r>
+              <a:rPr lang="en-US" sz="1000" dirty="0" smtClean="0">
+                <a:latin typeface="CMU Serif" panose="02000603000000000000" pitchFamily="2" charset="0"/>
+                <a:ea typeface="CMU Serif" panose="02000603000000000000" pitchFamily="2" charset="0"/>
+                <a:cs typeface="CMU Serif" panose="02000603000000000000" pitchFamily="2" charset="0"/>
+              </a:rPr>
+              <a:t>Labeled </a:t>
+            </a:r>
+            <a:r>
+              <a:rPr lang="en-US" sz="1000" dirty="0">
+                <a:latin typeface="CMU Serif" panose="02000603000000000000" pitchFamily="2" charset="0"/>
+                <a:ea typeface="CMU Serif" panose="02000603000000000000" pitchFamily="2" charset="0"/>
+                <a:cs typeface="CMU Serif" panose="02000603000000000000" pitchFamily="2" charset="0"/>
+              </a:rPr>
+              <a:t>(L) and Unlabeled (U) datasets .</a:t>
             </a:r>
             <a:endParaRPr lang="en-US" sz="1000" dirty="0">
               <a:latin typeface="CMU Serif" panose="02000603000000000000" pitchFamily="2" charset="0"/>
@@ -3519,7 +3583,7 @@
         </p:nvSpPr>
         <p:spPr>
           <a:xfrm>
-            <a:off x="1489508" y="1822604"/>
+            <a:off x="1489508" y="1503508"/>
             <a:ext cx="406685" cy="218971"/>
           </a:xfrm>
           <a:prstGeom prst="rect">
@@ -3547,11 +3611,6 @@
               </a:rPr>
               <a:t>V</a:t>
             </a:r>
-            <a:endParaRPr lang="en-US" sz="823" dirty="0">
-              <a:latin typeface="CMU Serif" panose="02000603000000000000" pitchFamily="2" charset="0"/>
-              <a:ea typeface="CMU Serif" panose="02000603000000000000" pitchFamily="2" charset="0"/>
-              <a:cs typeface="CMU Serif" panose="02000603000000000000" pitchFamily="2" charset="0"/>
-            </a:endParaRPr>
           </a:p>
         </p:txBody>
       </p:sp>
@@ -3560,14 +3619,14 @@
           <p:cNvPr id="3" name="Straight Arrow Connector 2"/>
           <p:cNvCxnSpPr>
             <a:stCxn id="15" idx="2"/>
-            <a:endCxn id="16" idx="0"/>
+            <a:endCxn id="21" idx="0"/>
           </p:cNvCxnSpPr>
           <p:nvPr/>
         </p:nvCxnSpPr>
         <p:spPr>
           <a:xfrm flipH="1">
-            <a:off x="791413" y="1292255"/>
-            <a:ext cx="686419" cy="155689"/>
+            <a:off x="1034734" y="1292255"/>
+            <a:ext cx="443098" cy="211253"/>
           </a:xfrm>
           <a:prstGeom prst="straightConnector1">
             <a:avLst/>
@@ -3599,14 +3658,14 @@
           <p:cNvPr id="9" name="Straight Arrow Connector 8"/>
           <p:cNvCxnSpPr>
             <a:stCxn id="15" idx="2"/>
-            <a:endCxn id="18" idx="0"/>
+            <a:endCxn id="25" idx="0"/>
           </p:cNvCxnSpPr>
           <p:nvPr/>
         </p:nvCxnSpPr>
         <p:spPr>
           <a:xfrm>
             <a:off x="1477832" y="1292255"/>
-            <a:ext cx="210823" cy="155689"/>
+            <a:ext cx="215019" cy="211253"/>
           </a:xfrm>
           <a:prstGeom prst="straightConnector1">
             <a:avLst/>
@@ -3637,15 +3696,15 @@
         <p:nvCxnSpPr>
           <p:cNvPr id="27" name="Straight Arrow Connector 26"/>
           <p:cNvCxnSpPr>
-            <a:stCxn id="16" idx="2"/>
-            <a:endCxn id="21" idx="0"/>
+            <a:stCxn id="15" idx="2"/>
+            <a:endCxn id="22" idx="0"/>
           </p:cNvCxnSpPr>
           <p:nvPr/>
         </p:nvCxnSpPr>
         <p:spPr>
           <a:xfrm>
-            <a:off x="791413" y="1666915"/>
-            <a:ext cx="243321" cy="155689"/>
+            <a:off x="1477832" y="1292255"/>
+            <a:ext cx="658116" cy="211692"/>
           </a:xfrm>
           <a:prstGeom prst="straightConnector1">
             <a:avLst/>
@@ -3676,15 +3735,15 @@
         <p:nvCxnSpPr>
           <p:cNvPr id="29" name="Straight Arrow Connector 28"/>
           <p:cNvCxnSpPr>
-            <a:stCxn id="16" idx="2"/>
-            <a:endCxn id="25" idx="0"/>
+            <a:stCxn id="21" idx="2"/>
+            <a:endCxn id="18" idx="0"/>
           </p:cNvCxnSpPr>
           <p:nvPr/>
         </p:nvCxnSpPr>
         <p:spPr>
           <a:xfrm>
-            <a:off x="791413" y="1666915"/>
-            <a:ext cx="901438" cy="155689"/>
+            <a:off x="1034734" y="1722479"/>
+            <a:ext cx="653921" cy="215482"/>
           </a:xfrm>
           <a:prstGeom prst="straightConnector1">
             <a:avLst/>
@@ -3715,15 +3774,15 @@
         <p:nvCxnSpPr>
           <p:cNvPr id="31" name="Straight Arrow Connector 30"/>
           <p:cNvCxnSpPr>
-            <a:stCxn id="16" idx="2"/>
-            <a:endCxn id="22" idx="0"/>
+            <a:stCxn id="21" idx="2"/>
+            <a:endCxn id="16" idx="0"/>
           </p:cNvCxnSpPr>
           <p:nvPr/>
         </p:nvCxnSpPr>
         <p:spPr>
-          <a:xfrm>
-            <a:off x="791413" y="1666915"/>
-            <a:ext cx="1344535" cy="156128"/>
+          <a:xfrm flipH="1">
+            <a:off x="791413" y="1722479"/>
+            <a:ext cx="243321" cy="215482"/>
           </a:xfrm>
           <a:prstGeom prst="straightConnector1">
             <a:avLst/>
@@ -3780,11 +3839,6 @@
               </a:rPr>
               <a:t>Use train dataset D to train a model M</a:t>
             </a:r>
-            <a:endParaRPr lang="en-US" sz="1000" dirty="0">
-              <a:latin typeface="CMU Serif" panose="02000603000000000000" pitchFamily="2" charset="0"/>
-              <a:ea typeface="CMU Serif" panose="02000603000000000000" pitchFamily="2" charset="0"/>
-              <a:cs typeface="CMU Serif" panose="02000603000000000000" pitchFamily="2" charset="0"/>
-            </a:endParaRPr>
           </a:p>
         </p:txBody>
       </p:sp>
@@ -3823,11 +3877,6 @@
               </a:rPr>
               <a:t>V</a:t>
             </a:r>
-            <a:endParaRPr lang="en-US" sz="823" dirty="0">
-              <a:latin typeface="CMU Serif" panose="02000603000000000000" pitchFamily="2" charset="0"/>
-              <a:ea typeface="CMU Serif" panose="02000603000000000000" pitchFamily="2" charset="0"/>
-              <a:cs typeface="CMU Serif" panose="02000603000000000000" pitchFamily="2" charset="0"/>
-            </a:endParaRPr>
           </a:p>
         </p:txBody>
       </p:sp>
@@ -3905,11 +3954,6 @@
               </a:rPr>
               <a:t>M</a:t>
             </a:r>
-            <a:endParaRPr lang="en-US" sz="823" dirty="0">
-              <a:latin typeface="CMU Serif" panose="02000603000000000000" pitchFamily="2" charset="0"/>
-              <a:ea typeface="CMU Serif" panose="02000603000000000000" pitchFamily="2" charset="0"/>
-              <a:cs typeface="CMU Serif" panose="02000603000000000000" pitchFamily="2" charset="0"/>
-            </a:endParaRPr>
           </a:p>
         </p:txBody>
       </p:sp>
@@ -4006,11 +4050,6 @@
               </a:rPr>
               <a:t>.</a:t>
             </a:r>
-            <a:endParaRPr lang="en-US" sz="640" dirty="0">
-              <a:latin typeface="CMU Serif" panose="02000603000000000000" pitchFamily="2" charset="0"/>
-              <a:ea typeface="CMU Serif" panose="02000603000000000000" pitchFamily="2" charset="0"/>
-              <a:cs typeface="CMU Serif" panose="02000603000000000000" pitchFamily="2" charset="0"/>
-            </a:endParaRPr>
           </a:p>
         </p:txBody>
       </p:sp>
@@ -4092,11 +4131,6 @@
               </a:rPr>
               <a:t> values.</a:t>
             </a:r>
-            <a:endParaRPr lang="en-US" sz="1000" dirty="0">
-              <a:latin typeface="CMU Serif" panose="02000603000000000000" pitchFamily="2" charset="0"/>
-              <a:ea typeface="CMU Serif" panose="02000603000000000000" pitchFamily="2" charset="0"/>
-              <a:cs typeface="CMU Serif" panose="02000603000000000000" pitchFamily="2" charset="0"/>
-            </a:endParaRPr>
           </a:p>
         </p:txBody>
       </p:sp>
@@ -4244,11 +4278,6 @@
               </a:rPr>
               <a:t>V</a:t>
             </a:r>
-            <a:endParaRPr lang="en-US" sz="823" dirty="0">
-              <a:latin typeface="CMU Serif" panose="02000603000000000000" pitchFamily="2" charset="0"/>
-              <a:ea typeface="CMU Serif" panose="02000603000000000000" pitchFamily="2" charset="0"/>
-              <a:cs typeface="CMU Serif" panose="02000603000000000000" pitchFamily="2" charset="0"/>
-            </a:endParaRPr>
           </a:p>
         </p:txBody>
       </p:sp>
@@ -4306,11 +4335,6 @@
               </a:rPr>
               <a:t>.</a:t>
             </a:r>
-            <a:endParaRPr lang="en-US" sz="640" dirty="0">
-              <a:latin typeface="CMU Serif" panose="02000603000000000000" pitchFamily="2" charset="0"/>
-              <a:ea typeface="CMU Serif" panose="02000603000000000000" pitchFamily="2" charset="0"/>
-              <a:cs typeface="CMU Serif" panose="02000603000000000000" pitchFamily="2" charset="0"/>
-            </a:endParaRPr>
           </a:p>
         </p:txBody>
       </p:sp>
@@ -4349,11 +4373,6 @@
               </a:rPr>
               <a:t>NN</a:t>
             </a:r>
-            <a:endParaRPr lang="en-US" sz="823" dirty="0">
-              <a:latin typeface="CMU Serif" panose="02000603000000000000" pitchFamily="2" charset="0"/>
-              <a:ea typeface="CMU Serif" panose="02000603000000000000" pitchFamily="2" charset="0"/>
-              <a:cs typeface="CMU Serif" panose="02000603000000000000" pitchFamily="2" charset="0"/>
-            </a:endParaRPr>
           </a:p>
         </p:txBody>
       </p:sp>
@@ -4590,11 +4609,6 @@
               </a:rPr>
               <a:t> from the previous step.</a:t>
             </a:r>
-            <a:endParaRPr lang="en-US" sz="1000" dirty="0">
-              <a:latin typeface="CMU Serif" panose="02000603000000000000" pitchFamily="2" charset="0"/>
-              <a:ea typeface="CMU Serif" panose="02000603000000000000" pitchFamily="2" charset="0"/>
-              <a:cs typeface="CMU Serif" panose="02000603000000000000" pitchFamily="2" charset="0"/>
-            </a:endParaRPr>
           </a:p>
         </p:txBody>
       </p:sp>
@@ -4633,11 +4647,6 @@
               </a:rPr>
               <a:t>T</a:t>
             </a:r>
-            <a:endParaRPr lang="en-US" sz="823" dirty="0">
-              <a:latin typeface="CMU Serif" panose="02000603000000000000" pitchFamily="2" charset="0"/>
-              <a:ea typeface="CMU Serif" panose="02000603000000000000" pitchFamily="2" charset="0"/>
-              <a:cs typeface="CMU Serif" panose="02000603000000000000" pitchFamily="2" charset="0"/>
-            </a:endParaRPr>
           </a:p>
         </p:txBody>
       </p:sp>
@@ -4803,11 +4812,6 @@
               </a:rPr>
               <a:t>loss</a:t>
             </a:r>
-            <a:endParaRPr lang="en-US" sz="823" dirty="0">
-              <a:latin typeface="CMU Serif" panose="02000603000000000000" pitchFamily="2" charset="0"/>
-              <a:ea typeface="CMU Serif" panose="02000603000000000000" pitchFamily="2" charset="0"/>
-              <a:cs typeface="CMU Serif" panose="02000603000000000000" pitchFamily="2" charset="0"/>
-            </a:endParaRPr>
           </a:p>
         </p:txBody>
       </p:sp>
@@ -4865,11 +4869,6 @@
               </a:rPr>
               <a:t> to calculate the loss   </a:t>
             </a:r>
-            <a:endParaRPr lang="en-US" sz="1000" dirty="0">
-              <a:latin typeface="CMU Serif" panose="02000603000000000000" pitchFamily="2" charset="0"/>
-              <a:ea typeface="CMU Serif" panose="02000603000000000000" pitchFamily="2" charset="0"/>
-              <a:cs typeface="CMU Serif" panose="02000603000000000000" pitchFamily="2" charset="0"/>
-            </a:endParaRPr>
           </a:p>
         </p:txBody>
       </p:sp>
@@ -5285,82 +5284,6 @@
           </a:prstGeom>
         </p:spPr>
       </p:pic>
-      <p:sp>
-        <p:nvSpPr>
-          <p:cNvPr id="98" name="Rectangle 97"/>
-          <p:cNvSpPr/>
-          <p:nvPr/>
-        </p:nvSpPr>
-        <p:spPr>
-          <a:xfrm>
-            <a:off x="435643" y="1347638"/>
-            <a:ext cx="6033737" cy="922344"/>
-          </a:xfrm>
-          <a:prstGeom prst="rect">
-            <a:avLst/>
-          </a:prstGeom>
-          <a:noFill/>
-          <a:ln w="38100">
-            <a:solidFill>
-              <a:srgbClr val="FF0000"/>
-            </a:solidFill>
-          </a:ln>
-        </p:spPr>
-        <p:style>
-          <a:lnRef idx="2">
-            <a:schemeClr val="accent1">
-              <a:shade val="50000"/>
-            </a:schemeClr>
-          </a:lnRef>
-          <a:fillRef idx="1">
-            <a:schemeClr val="accent1"/>
-          </a:fillRef>
-          <a:effectRef idx="0">
-            <a:schemeClr val="accent1"/>
-          </a:effectRef>
-          <a:fontRef idx="minor">
-            <a:schemeClr val="lt1"/>
-          </a:fontRef>
-        </p:style>
-        <p:txBody>
-          <a:bodyPr rtlCol="0" anchor="ctr"/>
-          <a:lstStyle/>
-          <a:p>
-            <a:pPr algn="ctr"/>
-            <a:endParaRPr lang="en-US"/>
-          </a:p>
-        </p:txBody>
-      </p:sp>
-      <p:sp>
-        <p:nvSpPr>
-          <p:cNvPr id="99" name="TextBox 98"/>
-          <p:cNvSpPr txBox="1"/>
-          <p:nvPr/>
-        </p:nvSpPr>
-        <p:spPr>
-          <a:xfrm>
-            <a:off x="100449" y="1637938"/>
-            <a:ext cx="292068" cy="369332"/>
-          </a:xfrm>
-          <a:prstGeom prst="rect">
-            <a:avLst/>
-          </a:prstGeom>
-          <a:noFill/>
-        </p:spPr>
-        <p:txBody>
-          <a:bodyPr wrap="none" rtlCol="0">
-            <a:spAutoFit/>
-          </a:bodyPr>
-          <a:lstStyle/>
-          <a:p>
-            <a:r>
-              <a:rPr lang="en-US" dirty="0" smtClean="0"/>
-              <a:t>?</a:t>
-            </a:r>
-            <a:endParaRPr lang="en-US" dirty="0"/>
-          </a:p>
-        </p:txBody>
-      </p:sp>
     </p:spTree>
     <p:extLst>
       <p:ext uri="{BB962C8B-B14F-4D97-AF65-F5344CB8AC3E}">
@@ -5412,7 +5335,11 @@
           <a:prstGeom prst="rect">
             <a:avLst/>
           </a:prstGeom>
-          <a:noFill/>
+          <a:solidFill>
+            <a:schemeClr val="bg2">
+              <a:lumMod val="50000"/>
+            </a:schemeClr>
+          </a:solidFill>
         </p:spPr>
         <p:txBody>
           <a:bodyPr wrap="square" rtlCol="0">

--- a/Hypothesis_Approach.pptx
+++ b/Hypothesis_Approach.pptx
@@ -244,7 +244,7 @@
           <a:p>
             <a:fld id="{F4E22AD8-1461-413E-88B7-0A4B8F23A229}" type="datetimeFigureOut">
               <a:rPr lang="en-US" smtClean="0"/>
-              <a:t>5/15/2024</a:t>
+              <a:t>5/17/2024</a:t>
             </a:fld>
             <a:endParaRPr lang="en-US"/>
           </a:p>
@@ -414,7 +414,7 @@
           <a:p>
             <a:fld id="{F4E22AD8-1461-413E-88B7-0A4B8F23A229}" type="datetimeFigureOut">
               <a:rPr lang="en-US" smtClean="0"/>
-              <a:t>5/15/2024</a:t>
+              <a:t>5/17/2024</a:t>
             </a:fld>
             <a:endParaRPr lang="en-US"/>
           </a:p>
@@ -594,7 +594,7 @@
           <a:p>
             <a:fld id="{F4E22AD8-1461-413E-88B7-0A4B8F23A229}" type="datetimeFigureOut">
               <a:rPr lang="en-US" smtClean="0"/>
-              <a:t>5/15/2024</a:t>
+              <a:t>5/17/2024</a:t>
             </a:fld>
             <a:endParaRPr lang="en-US"/>
           </a:p>
@@ -764,7 +764,7 @@
           <a:p>
             <a:fld id="{F4E22AD8-1461-413E-88B7-0A4B8F23A229}" type="datetimeFigureOut">
               <a:rPr lang="en-US" smtClean="0"/>
-              <a:t>5/15/2024</a:t>
+              <a:t>5/17/2024</a:t>
             </a:fld>
             <a:endParaRPr lang="en-US"/>
           </a:p>
@@ -1008,7 +1008,7 @@
           <a:p>
             <a:fld id="{F4E22AD8-1461-413E-88B7-0A4B8F23A229}" type="datetimeFigureOut">
               <a:rPr lang="en-US" smtClean="0"/>
-              <a:t>5/15/2024</a:t>
+              <a:t>5/17/2024</a:t>
             </a:fld>
             <a:endParaRPr lang="en-US"/>
           </a:p>
@@ -1240,7 +1240,7 @@
           <a:p>
             <a:fld id="{F4E22AD8-1461-413E-88B7-0A4B8F23A229}" type="datetimeFigureOut">
               <a:rPr lang="en-US" smtClean="0"/>
-              <a:t>5/15/2024</a:t>
+              <a:t>5/17/2024</a:t>
             </a:fld>
             <a:endParaRPr lang="en-US"/>
           </a:p>
@@ -1607,7 +1607,7 @@
           <a:p>
             <a:fld id="{F4E22AD8-1461-413E-88B7-0A4B8F23A229}" type="datetimeFigureOut">
               <a:rPr lang="en-US" smtClean="0"/>
-              <a:t>5/15/2024</a:t>
+              <a:t>5/17/2024</a:t>
             </a:fld>
             <a:endParaRPr lang="en-US"/>
           </a:p>
@@ -1725,7 +1725,7 @@
           <a:p>
             <a:fld id="{F4E22AD8-1461-413E-88B7-0A4B8F23A229}" type="datetimeFigureOut">
               <a:rPr lang="en-US" smtClean="0"/>
-              <a:t>5/15/2024</a:t>
+              <a:t>5/17/2024</a:t>
             </a:fld>
             <a:endParaRPr lang="en-US"/>
           </a:p>
@@ -1820,7 +1820,7 @@
           <a:p>
             <a:fld id="{F4E22AD8-1461-413E-88B7-0A4B8F23A229}" type="datetimeFigureOut">
               <a:rPr lang="en-US" smtClean="0"/>
-              <a:t>5/15/2024</a:t>
+              <a:t>5/17/2024</a:t>
             </a:fld>
             <a:endParaRPr lang="en-US"/>
           </a:p>
@@ -2097,7 +2097,7 @@
           <a:p>
             <a:fld id="{F4E22AD8-1461-413E-88B7-0A4B8F23A229}" type="datetimeFigureOut">
               <a:rPr lang="en-US" smtClean="0"/>
-              <a:t>5/15/2024</a:t>
+              <a:t>5/17/2024</a:t>
             </a:fld>
             <a:endParaRPr lang="en-US"/>
           </a:p>
@@ -2354,7 +2354,7 @@
           <a:p>
             <a:fld id="{F4E22AD8-1461-413E-88B7-0A4B8F23A229}" type="datetimeFigureOut">
               <a:rPr lang="en-US" smtClean="0"/>
-              <a:t>5/15/2024</a:t>
+              <a:t>5/17/2024</a:t>
             </a:fld>
             <a:endParaRPr lang="en-US"/>
           </a:p>
@@ -2567,7 +2567,7 @@
           <a:p>
             <a:fld id="{F4E22AD8-1461-413E-88B7-0A4B8F23A229}" type="datetimeFigureOut">
               <a:rPr lang="en-US" smtClean="0"/>
-              <a:t>5/15/2024</a:t>
+              <a:t>5/17/2024</a:t>
             </a:fld>
             <a:endParaRPr lang="en-US"/>
           </a:p>
@@ -3027,7 +3027,7 @@
         <p:spPr>
           <a:xfrm>
             <a:off x="584374" y="2421189"/>
-            <a:ext cx="264816" cy="218971"/>
+            <a:ext cx="250390" cy="218971"/>
           </a:xfrm>
           <a:prstGeom prst="rect">
             <a:avLst/>
@@ -3046,13 +3046,18 @@
           <a:lstStyle/>
           <a:p>
             <a:r>
-              <a:rPr lang="en-US" sz="823" dirty="0">
-                <a:latin typeface="CMU Serif" panose="02000603000000000000" pitchFamily="2" charset="0"/>
-                <a:ea typeface="CMU Serif" panose="02000603000000000000" pitchFamily="2" charset="0"/>
-                <a:cs typeface="CMU Serif" panose="02000603000000000000" pitchFamily="2" charset="0"/>
-              </a:rPr>
-              <a:t>D</a:t>
-            </a:r>
+              <a:rPr lang="en-US" sz="823" dirty="0" smtClean="0">
+                <a:latin typeface="CMU Serif" panose="02000603000000000000" pitchFamily="2" charset="0"/>
+                <a:ea typeface="CMU Serif" panose="02000603000000000000" pitchFamily="2" charset="0"/>
+                <a:cs typeface="CMU Serif" panose="02000603000000000000" pitchFamily="2" charset="0"/>
+              </a:rPr>
+              <a:t>L</a:t>
+            </a:r>
+            <a:endParaRPr lang="en-US" sz="823" dirty="0">
+              <a:latin typeface="CMU Serif" panose="02000603000000000000" pitchFamily="2" charset="0"/>
+              <a:ea typeface="CMU Serif" panose="02000603000000000000" pitchFamily="2" charset="0"/>
+              <a:cs typeface="CMU Serif" panose="02000603000000000000" pitchFamily="2" charset="0"/>
+            </a:endParaRPr>
           </a:p>
         </p:txBody>
       </p:sp>
@@ -3067,8 +3072,8 @@
         </p:nvCxnSpPr>
         <p:spPr>
           <a:xfrm flipV="1">
-            <a:off x="849190" y="2530626"/>
-            <a:ext cx="222745" cy="49"/>
+            <a:off x="834764" y="2530626"/>
+            <a:ext cx="237171" cy="49"/>
           </a:xfrm>
           <a:prstGeom prst="straightConnector1">
             <a:avLst/>
@@ -3361,15 +3366,7 @@
                 <a:ea typeface="CMU Serif" panose="02000603000000000000" pitchFamily="2" charset="0"/>
                 <a:cs typeface="CMU Serif" panose="02000603000000000000" pitchFamily="2" charset="0"/>
               </a:rPr>
-              <a:t>E) </a:t>
-            </a:r>
-            <a:r>
-              <a:rPr lang="en-US" sz="1000" dirty="0" smtClean="0">
-                <a:latin typeface="CMU Serif" panose="02000603000000000000" pitchFamily="2" charset="0"/>
-                <a:ea typeface="CMU Serif" panose="02000603000000000000" pitchFamily="2" charset="0"/>
-                <a:cs typeface="CMU Serif" panose="02000603000000000000" pitchFamily="2" charset="0"/>
-              </a:rPr>
-              <a:t>split </a:t>
+              <a:t>E) split </a:t>
             </a:r>
             <a:r>
               <a:rPr lang="en-US" sz="1000" dirty="0">
@@ -3525,7 +3522,15 @@
                 <a:ea typeface="CMU Serif" panose="02000603000000000000" pitchFamily="2" charset="0"/>
                 <a:cs typeface="CMU Serif" panose="02000603000000000000" pitchFamily="2" charset="0"/>
               </a:rPr>
-              <a:t>)</a:t>
+              <a:t>) gets </a:t>
+            </a:r>
+            <a:r>
+              <a:rPr lang="en-US" sz="1000" dirty="0">
+                <a:latin typeface="CMU Serif" panose="02000603000000000000" pitchFamily="2" charset="0"/>
+                <a:ea typeface="CMU Serif" panose="02000603000000000000" pitchFamily="2" charset="0"/>
+                <a:cs typeface="CMU Serif" panose="02000603000000000000" pitchFamily="2" charset="0"/>
+              </a:rPr>
+              <a:t>split </a:t>
             </a:r>
             <a:r>
               <a:rPr lang="en-US" sz="1000" dirty="0" smtClean="0">
@@ -3533,7 +3538,7 @@
                 <a:ea typeface="CMU Serif" panose="02000603000000000000" pitchFamily="2" charset="0"/>
                 <a:cs typeface="CMU Serif" panose="02000603000000000000" pitchFamily="2" charset="0"/>
               </a:rPr>
-              <a:t> gets </a:t>
+              <a:t>into Labeled </a:t>
             </a:r>
             <a:r>
               <a:rPr lang="en-US" sz="1000" dirty="0">
@@ -3541,37 +3546,8 @@
                 <a:ea typeface="CMU Serif" panose="02000603000000000000" pitchFamily="2" charset="0"/>
                 <a:cs typeface="CMU Serif" panose="02000603000000000000" pitchFamily="2" charset="0"/>
               </a:rPr>
-              <a:t>split </a:t>
-            </a:r>
-            <a:r>
-              <a:rPr lang="en-US" sz="1000" dirty="0" smtClean="0">
-                <a:latin typeface="CMU Serif" panose="02000603000000000000" pitchFamily="2" charset="0"/>
-                <a:ea typeface="CMU Serif" panose="02000603000000000000" pitchFamily="2" charset="0"/>
-                <a:cs typeface="CMU Serif" panose="02000603000000000000" pitchFamily="2" charset="0"/>
-              </a:rPr>
-              <a:t>into </a:t>
-            </a:r>
-            <a:r>
-              <a:rPr lang="en-US" sz="1000" dirty="0" smtClean="0">
-                <a:latin typeface="CMU Serif" panose="02000603000000000000" pitchFamily="2" charset="0"/>
-                <a:ea typeface="CMU Serif" panose="02000603000000000000" pitchFamily="2" charset="0"/>
-                <a:cs typeface="CMU Serif" panose="02000603000000000000" pitchFamily="2" charset="0"/>
-              </a:rPr>
-              <a:t>Labeled </a:t>
-            </a:r>
-            <a:r>
-              <a:rPr lang="en-US" sz="1000" dirty="0">
-                <a:latin typeface="CMU Serif" panose="02000603000000000000" pitchFamily="2" charset="0"/>
-                <a:ea typeface="CMU Serif" panose="02000603000000000000" pitchFamily="2" charset="0"/>
-                <a:cs typeface="CMU Serif" panose="02000603000000000000" pitchFamily="2" charset="0"/>
-              </a:rPr>
               <a:t>(L) and Unlabeled (U) datasets .</a:t>
             </a:r>
-            <a:endParaRPr lang="en-US" sz="1000" dirty="0">
-              <a:latin typeface="CMU Serif" panose="02000603000000000000" pitchFamily="2" charset="0"/>
-              <a:ea typeface="CMU Serif" panose="02000603000000000000" pitchFamily="2" charset="0"/>
-              <a:cs typeface="CMU Serif" panose="02000603000000000000" pitchFamily="2" charset="0"/>
-            </a:endParaRPr>
           </a:p>
         </p:txBody>
       </p:sp>
@@ -3837,7 +3813,23 @@
                 <a:ea typeface="CMU Serif" panose="02000603000000000000" pitchFamily="2" charset="0"/>
                 <a:cs typeface="CMU Serif" panose="02000603000000000000" pitchFamily="2" charset="0"/>
               </a:rPr>
-              <a:t>Use train dataset D to train a model M</a:t>
+              <a:t>Use train dataset </a:t>
+            </a:r>
+            <a:r>
+              <a:rPr lang="en-US" sz="1000" dirty="0" smtClean="0">
+                <a:latin typeface="CMU Serif" panose="02000603000000000000" pitchFamily="2" charset="0"/>
+                <a:ea typeface="CMU Serif" panose="02000603000000000000" pitchFamily="2" charset="0"/>
+                <a:cs typeface="CMU Serif" panose="02000603000000000000" pitchFamily="2" charset="0"/>
+              </a:rPr>
+              <a:t>L </a:t>
+            </a:r>
+            <a:r>
+              <a:rPr lang="en-US" sz="1000" dirty="0">
+                <a:latin typeface="CMU Serif" panose="02000603000000000000" pitchFamily="2" charset="0"/>
+                <a:ea typeface="CMU Serif" panose="02000603000000000000" pitchFamily="2" charset="0"/>
+                <a:cs typeface="CMU Serif" panose="02000603000000000000" pitchFamily="2" charset="0"/>
+              </a:rPr>
+              <a:t>to train a model M</a:t>
             </a:r>
           </a:p>
         </p:txBody>
@@ -4097,15 +4089,23 @@
                 <a:ea typeface="CMU Serif" panose="02000603000000000000" pitchFamily="2" charset="0"/>
                 <a:cs typeface="CMU Serif" panose="02000603000000000000" pitchFamily="2" charset="0"/>
               </a:rPr>
-              <a:t> strategy (</a:t>
-            </a:r>
-            <a:r>
-              <a:rPr lang="en-US" sz="1000" dirty="0" err="1">
-                <a:latin typeface="CMU Serif" panose="02000603000000000000" pitchFamily="2" charset="0"/>
-                <a:ea typeface="CMU Serif" panose="02000603000000000000" pitchFamily="2" charset="0"/>
-                <a:cs typeface="CMU Serif" panose="02000603000000000000" pitchFamily="2" charset="0"/>
-              </a:rPr>
-              <a:t>optuna</a:t>
+              <a:t> strategy </a:t>
+            </a:r>
+            <a:r>
+              <a:rPr lang="en-US" sz="1000" dirty="0" smtClean="0">
+                <a:latin typeface="CMU Serif" panose="02000603000000000000" pitchFamily="2" charset="0"/>
+                <a:ea typeface="CMU Serif" panose="02000603000000000000" pitchFamily="2" charset="0"/>
+                <a:cs typeface="CMU Serif" panose="02000603000000000000" pitchFamily="2" charset="0"/>
+              </a:rPr>
+              <a:t>(</a:t>
+            </a:r>
+            <a:r>
+              <a:rPr lang="en-US" sz="1000" dirty="0" err="1" smtClean="0">
+                <a:latin typeface="CMU Serif" panose="02000603000000000000" pitchFamily="2" charset="0"/>
+                <a:ea typeface="CMU Serif" panose="02000603000000000000" pitchFamily="2" charset="0"/>
+                <a:cs typeface="CMU Serif" panose="02000603000000000000" pitchFamily="2" charset="0"/>
+              </a:rPr>
+              <a:t>Optuna</a:t>
             </a:r>
             <a:r>
               <a:rPr lang="en-US" sz="1000" dirty="0">
@@ -4264,20 +4264,25 @@
                 <a:ea typeface="CMU Serif" panose="02000603000000000000" pitchFamily="2" charset="0"/>
                 <a:cs typeface="CMU Serif" panose="02000603000000000000" pitchFamily="2" charset="0"/>
               </a:rPr>
-              <a:t>D</a:t>
-            </a:r>
-            <a:r>
-              <a:rPr lang="en-US" sz="823" dirty="0"/>
+              <a:t>L</a:t>
+            </a:r>
+            <a:r>
+              <a:rPr lang="en-US" sz="823" smtClean="0"/>
               <a:t>∪</a:t>
             </a:r>
             <a:r>
-              <a:rPr lang="en-US" sz="823" dirty="0">
+              <a:rPr lang="en-US" sz="823" dirty="0" smtClean="0">
                 <a:latin typeface="CMU Serif" panose="02000603000000000000" pitchFamily="2" charset="0"/>
                 <a:ea typeface="CMU Serif" panose="02000603000000000000" pitchFamily="2" charset="0"/>
                 <a:cs typeface="CMU Serif" panose="02000603000000000000" pitchFamily="2" charset="0"/>
               </a:rPr>
               <a:t>V</a:t>
             </a:r>
+            <a:endParaRPr lang="en-US" sz="823" dirty="0">
+              <a:latin typeface="CMU Serif" panose="02000603000000000000" pitchFamily="2" charset="0"/>
+              <a:ea typeface="CMU Serif" panose="02000603000000000000" pitchFamily="2" charset="0"/>
+              <a:cs typeface="CMU Serif" panose="02000603000000000000" pitchFamily="2" charset="0"/>
+            </a:endParaRPr>
           </a:p>
         </p:txBody>
       </p:sp>

--- a/Hypothesis_Approach.pptx
+++ b/Hypothesis_Approach.pptx
@@ -4267,7 +4267,7 @@
               <a:t>L</a:t>
             </a:r>
             <a:r>
-              <a:rPr lang="en-US" sz="823" smtClean="0"/>
+              <a:rPr lang="en-US" sz="823" dirty="0" smtClean="0"/>
               <a:t>∪</a:t>
             </a:r>
             <a:r>
